--- a/12-exchange-algorithms/slides-kidneys.pptx
+++ b/12-exchange-algorithms/slides-kidneys.pptx
@@ -9,10 +9,10 @@
     <p:sldMasterId id="2147483696" r:id="rId5"/>
   </p:sldMasterIdLst>
   <p:notesMasterIdLst>
-    <p:notesMasterId r:id="rId30"/>
+    <p:notesMasterId r:id="rId29"/>
   </p:notesMasterIdLst>
   <p:handoutMasterIdLst>
-    <p:handoutMasterId r:id="rId31"/>
+    <p:handoutMasterId r:id="rId30"/>
   </p:handoutMasterIdLst>
   <p:sldIdLst>
     <p:sldId id="256" r:id="rId6"/>
@@ -25,20 +25,19 @@
     <p:sldId id="263" r:id="rId13"/>
     <p:sldId id="264" r:id="rId14"/>
     <p:sldId id="265" r:id="rId15"/>
-    <p:sldId id="266" r:id="rId16"/>
-    <p:sldId id="268" r:id="rId17"/>
-    <p:sldId id="269" r:id="rId18"/>
-    <p:sldId id="270" r:id="rId19"/>
-    <p:sldId id="271" r:id="rId20"/>
-    <p:sldId id="272" r:id="rId21"/>
-    <p:sldId id="279" r:id="rId22"/>
-    <p:sldId id="280" r:id="rId23"/>
-    <p:sldId id="281" r:id="rId24"/>
-    <p:sldId id="282" r:id="rId25"/>
-    <p:sldId id="283" r:id="rId26"/>
-    <p:sldId id="284" r:id="rId27"/>
-    <p:sldId id="285" r:id="rId28"/>
-    <p:sldId id="286" r:id="rId29"/>
+    <p:sldId id="268" r:id="rId16"/>
+    <p:sldId id="269" r:id="rId17"/>
+    <p:sldId id="270" r:id="rId18"/>
+    <p:sldId id="271" r:id="rId19"/>
+    <p:sldId id="272" r:id="rId20"/>
+    <p:sldId id="279" r:id="rId21"/>
+    <p:sldId id="280" r:id="rId22"/>
+    <p:sldId id="281" r:id="rId23"/>
+    <p:sldId id="282" r:id="rId24"/>
+    <p:sldId id="283" r:id="rId25"/>
+    <p:sldId id="284" r:id="rId26"/>
+    <p:sldId id="285" r:id="rId27"/>
+    <p:sldId id="286" r:id="rId28"/>
   </p:sldIdLst>
   <p:sldSz cx="10080625" cy="7559675"/>
   <p:notesSz cx="7559675" cy="10691813"/>
@@ -137,6 +136,11 @@
       </a:defRPr>
     </a:lvl9pPr>
   </p:defaultTextStyle>
+  <p:extLst>
+    <p:ext uri="{EFAFB233-063F-42B5-8137-9DF3F51BA10A}">
+      <p15:sldGuideLst xmlns:p15="http://schemas.microsoft.com/office/powerpoint/2012/main"/>
+    </p:ext>
+  </p:extLst>
 </p:presentation>
 </file>
 
@@ -1099,7 +1103,7 @@
           <a:p>
             <a:pPr lvl="0"/>
             <a:fld id="{E10CAF7F-92C7-462A-A7DF-270BE68FE187}" type="slidenum">
-              <a:t>12</a:t>
+              <a:t>11</a:t>
             </a:fld>
             <a:endParaRPr lang="en-US"/>
           </a:p>
@@ -1220,7 +1224,7 @@
           <a:p>
             <a:pPr lvl="0"/>
             <a:fld id="{EFA08F44-82CA-415F-8DEE-70C409E66BF1}" type="slidenum">
-              <a:t>13</a:t>
+              <a:t>12</a:t>
             </a:fld>
             <a:endParaRPr lang="en-US"/>
           </a:p>
@@ -1341,7 +1345,7 @@
           <a:p>
             <a:pPr lvl="0"/>
             <a:fld id="{8723CB86-733E-401F-83C9-A582C787B964}" type="slidenum">
-              <a:t>14</a:t>
+              <a:t>13</a:t>
             </a:fld>
             <a:endParaRPr lang="en-US"/>
           </a:p>
@@ -1462,7 +1466,7 @@
           <a:p>
             <a:pPr lvl="0"/>
             <a:fld id="{88313835-40B6-452A-A7BB-880C3BD34151}" type="slidenum">
-              <a:t>15</a:t>
+              <a:t>14</a:t>
             </a:fld>
             <a:endParaRPr lang="en-US"/>
           </a:p>
@@ -1583,7 +1587,7 @@
           <a:p>
             <a:pPr lvl="0"/>
             <a:fld id="{E5E4AC29-D9AA-4B4B-9B0B-C7A96F41E032}" type="slidenum">
-              <a:t>16</a:t>
+              <a:t>15</a:t>
             </a:fld>
             <a:endParaRPr lang="en-US"/>
           </a:p>
@@ -1704,7 +1708,7 @@
           <a:p>
             <a:pPr lvl="0"/>
             <a:fld id="{C642C740-425D-4E58-A8A6-47753EC50DF3}" type="slidenum">
-              <a:t>17</a:t>
+              <a:t>16</a:t>
             </a:fld>
             <a:endParaRPr lang="en-US"/>
           </a:p>
@@ -1820,7 +1824,7 @@
           <a:p>
             <a:pPr lvl="0"/>
             <a:fld id="{3474DC80-2679-4495-86C9-685D386C6390}" type="slidenum">
-              <a:t>18</a:t>
+              <a:t>17</a:t>
             </a:fld>
             <a:endParaRPr lang="en-US"/>
           </a:p>
@@ -1941,7 +1945,7 @@
           <a:p>
             <a:pPr lvl="0"/>
             <a:fld id="{EF877AF2-3DA0-4226-B7F2-167BB4955C59}" type="slidenum">
-              <a:t>19</a:t>
+              <a:t>18</a:t>
             </a:fld>
             <a:endParaRPr lang="en-US"/>
           </a:p>
@@ -2062,7 +2066,7 @@
           <a:p>
             <a:pPr lvl="0"/>
             <a:fld id="{CD9BB68A-9462-4118-9877-35B795DBB45E}" type="slidenum">
-              <a:t>20</a:t>
+              <a:t>19</a:t>
             </a:fld>
             <a:endParaRPr lang="en-US"/>
           </a:p>
@@ -2304,7 +2308,7 @@
           <a:p>
             <a:pPr lvl="0"/>
             <a:fld id="{0A336826-C123-48B3-A3EF-B5FC2EF3BAB2}" type="slidenum">
-              <a:t>21</a:t>
+              <a:t>20</a:t>
             </a:fld>
             <a:endParaRPr lang="en-US"/>
           </a:p>
@@ -2425,7 +2429,7 @@
           <a:p>
             <a:pPr lvl="0"/>
             <a:fld id="{AA2AE893-6682-4735-A89F-4CEDE16E4C92}" type="slidenum">
-              <a:t>22</a:t>
+              <a:t>21</a:t>
             </a:fld>
             <a:endParaRPr lang="en-US"/>
           </a:p>
@@ -2547,7 +2551,7 @@
           <a:p>
             <a:pPr lvl="0"/>
             <a:fld id="{8B6C51B6-D3FC-4642-8D68-26865D9796EF}" type="slidenum">
-              <a:t>23</a:t>
+              <a:t>22</a:t>
             </a:fld>
             <a:endParaRPr lang="en-US" sz="1300">
               <a:latin typeface="Arial" pitchFamily="80"/>
@@ -2583,7 +2587,7 @@
           <a:p>
             <a:pPr lvl="0"/>
             <a:fld id="{99AFC167-4EAD-4488-9DC0-B0D43A5F2233}" type="slidenum">
-              <a:t>23</a:t>
+              <a:t>22</a:t>
             </a:fld>
             <a:endParaRPr lang="en-US"/>
           </a:p>
@@ -2706,7 +2710,7 @@
           <a:p>
             <a:pPr lvl="0"/>
             <a:fld id="{D285CED8-BDD2-4A6C-A4EC-B2943C7AC002}" type="slidenum">
-              <a:t>24</a:t>
+              <a:t>23</a:t>
             </a:fld>
             <a:endParaRPr lang="en-US"/>
           </a:p>
@@ -4405,7 +4409,7 @@
           <a:p>
             <a:fld id="{9602BFBB-AED6-48E7-B614-F286ADCBB66A}" type="datetimeFigureOut">
               <a:rPr lang="he-IL" smtClean="0"/>
-              <a:t>כ"ב/טבת/תשפ"ו</a:t>
+              <a:t>כ"ג/טבת/תשפ"ו</a:t>
             </a:fld>
             <a:endParaRPr lang="he-IL"/>
           </a:p>
@@ -4604,7 +4608,7 @@
           <a:p>
             <a:fld id="{9602BFBB-AED6-48E7-B614-F286ADCBB66A}" type="datetimeFigureOut">
               <a:rPr lang="he-IL" smtClean="0"/>
-              <a:t>כ"ב/טבת/תשפ"ו</a:t>
+              <a:t>כ"ג/טבת/תשפ"ו</a:t>
             </a:fld>
             <a:endParaRPr lang="he-IL"/>
           </a:p>
@@ -4879,7 +4883,7 @@
           <a:p>
             <a:fld id="{9602BFBB-AED6-48E7-B614-F286ADCBB66A}" type="datetimeFigureOut">
               <a:rPr lang="he-IL" smtClean="0"/>
-              <a:t>כ"ב/טבת/תשפ"ו</a:t>
+              <a:t>כ"ג/טבת/תשפ"ו</a:t>
             </a:fld>
             <a:endParaRPr lang="he-IL"/>
           </a:p>
@@ -5146,7 +5150,7 @@
           <a:p>
             <a:fld id="{9602BFBB-AED6-48E7-B614-F286ADCBB66A}" type="datetimeFigureOut">
               <a:rPr lang="he-IL" smtClean="0"/>
-              <a:t>כ"ב/טבת/תשפ"ו</a:t>
+              <a:t>כ"ג/טבת/תשפ"ו</a:t>
             </a:fld>
             <a:endParaRPr lang="he-IL"/>
           </a:p>
@@ -5560,7 +5564,7 @@
           <a:p>
             <a:fld id="{9602BFBB-AED6-48E7-B614-F286ADCBB66A}" type="datetimeFigureOut">
               <a:rPr lang="he-IL" smtClean="0"/>
-              <a:t>כ"ב/טבת/תשפ"ו</a:t>
+              <a:t>כ"ג/טבת/תשפ"ו</a:t>
             </a:fld>
             <a:endParaRPr lang="he-IL"/>
           </a:p>
@@ -5701,7 +5705,7 @@
           <a:p>
             <a:fld id="{9602BFBB-AED6-48E7-B614-F286ADCBB66A}" type="datetimeFigureOut">
               <a:rPr lang="he-IL" smtClean="0"/>
-              <a:t>כ"ב/טבת/תשפ"ו</a:t>
+              <a:t>כ"ג/טבת/תשפ"ו</a:t>
             </a:fld>
             <a:endParaRPr lang="he-IL"/>
           </a:p>
@@ -5813,7 +5817,7 @@
           <a:p>
             <a:fld id="{9602BFBB-AED6-48E7-B614-F286ADCBB66A}" type="datetimeFigureOut">
               <a:rPr lang="he-IL" smtClean="0"/>
-              <a:t>כ"ב/טבת/תשפ"ו</a:t>
+              <a:t>כ"ג/טבת/תשפ"ו</a:t>
             </a:fld>
             <a:endParaRPr lang="he-IL"/>
           </a:p>
@@ -6125,7 +6129,7 @@
           <a:p>
             <a:fld id="{9602BFBB-AED6-48E7-B614-F286ADCBB66A}" type="datetimeFigureOut">
               <a:rPr lang="he-IL" smtClean="0"/>
-              <a:t>כ"ב/טבת/תשפ"ו</a:t>
+              <a:t>כ"ג/טבת/תשפ"ו</a:t>
             </a:fld>
             <a:endParaRPr lang="he-IL"/>
           </a:p>
@@ -6611,7 +6615,7 @@
           <a:p>
             <a:fld id="{9602BFBB-AED6-48E7-B614-F286ADCBB66A}" type="datetimeFigureOut">
               <a:rPr lang="he-IL" smtClean="0"/>
-              <a:t>כ"ב/טבת/תשפ"ו</a:t>
+              <a:t>כ"ג/טבת/תשפ"ו</a:t>
             </a:fld>
             <a:endParaRPr lang="he-IL"/>
           </a:p>
@@ -6810,7 +6814,7 @@
           <a:p>
             <a:fld id="{9602BFBB-AED6-48E7-B614-F286ADCBB66A}" type="datetimeFigureOut">
               <a:rPr lang="he-IL" smtClean="0"/>
-              <a:t>כ"ב/טבת/תשפ"ו</a:t>
+              <a:t>כ"ג/טבת/תשפ"ו</a:t>
             </a:fld>
             <a:endParaRPr lang="he-IL"/>
           </a:p>
@@ -7019,7 +7023,7 @@
           <a:p>
             <a:fld id="{9602BFBB-AED6-48E7-B614-F286ADCBB66A}" type="datetimeFigureOut">
               <a:rPr lang="he-IL" smtClean="0"/>
-              <a:t>כ"ב/טבת/תשפ"ו</a:t>
+              <a:t>כ"ג/טבת/תשפ"ו</a:t>
             </a:fld>
             <a:endParaRPr lang="he-IL"/>
           </a:p>
@@ -7240,7 +7244,7 @@
           <a:p>
             <a:fld id="{5B9223C0-ACDA-4AC3-8556-9784E6854D03}" type="datetimeFigureOut">
               <a:rPr lang="he-IL" smtClean="0"/>
-              <a:t>כ"ב/טבת/תשפ"ו</a:t>
+              <a:t>כ"ג/טבת/תשפ"ו</a:t>
             </a:fld>
             <a:endParaRPr lang="he-IL"/>
           </a:p>
@@ -7439,7 +7443,7 @@
           <a:p>
             <a:fld id="{5B9223C0-ACDA-4AC3-8556-9784E6854D03}" type="datetimeFigureOut">
               <a:rPr lang="he-IL" smtClean="0"/>
-              <a:t>כ"ב/טבת/תשפ"ו</a:t>
+              <a:t>כ"ג/טבת/תשפ"ו</a:t>
             </a:fld>
             <a:endParaRPr lang="he-IL"/>
           </a:p>
@@ -7714,7 +7718,7 @@
           <a:p>
             <a:fld id="{5B9223C0-ACDA-4AC3-8556-9784E6854D03}" type="datetimeFigureOut">
               <a:rPr lang="he-IL" smtClean="0"/>
-              <a:t>כ"ב/טבת/תשפ"ו</a:t>
+              <a:t>כ"ג/טבת/תשפ"ו</a:t>
             </a:fld>
             <a:endParaRPr lang="he-IL"/>
           </a:p>
@@ -7981,7 +7985,7 @@
           <a:p>
             <a:fld id="{5B9223C0-ACDA-4AC3-8556-9784E6854D03}" type="datetimeFigureOut">
               <a:rPr lang="he-IL" smtClean="0"/>
-              <a:t>כ"ב/טבת/תשפ"ו</a:t>
+              <a:t>כ"ג/טבת/תשפ"ו</a:t>
             </a:fld>
             <a:endParaRPr lang="he-IL"/>
           </a:p>
@@ -8395,7 +8399,7 @@
           <a:p>
             <a:fld id="{5B9223C0-ACDA-4AC3-8556-9784E6854D03}" type="datetimeFigureOut">
               <a:rPr lang="he-IL" smtClean="0"/>
-              <a:t>כ"ב/טבת/תשפ"ו</a:t>
+              <a:t>כ"ג/טבת/תשפ"ו</a:t>
             </a:fld>
             <a:endParaRPr lang="he-IL"/>
           </a:p>
@@ -8536,7 +8540,7 @@
           <a:p>
             <a:fld id="{5B9223C0-ACDA-4AC3-8556-9784E6854D03}" type="datetimeFigureOut">
               <a:rPr lang="he-IL" smtClean="0"/>
-              <a:t>כ"ב/טבת/תשפ"ו</a:t>
+              <a:t>כ"ג/טבת/תשפ"ו</a:t>
             </a:fld>
             <a:endParaRPr lang="he-IL"/>
           </a:p>
@@ -8648,7 +8652,7 @@
           <a:p>
             <a:fld id="{5B9223C0-ACDA-4AC3-8556-9784E6854D03}" type="datetimeFigureOut">
               <a:rPr lang="he-IL" smtClean="0"/>
-              <a:t>כ"ב/טבת/תשפ"ו</a:t>
+              <a:t>כ"ג/טבת/תשפ"ו</a:t>
             </a:fld>
             <a:endParaRPr lang="he-IL"/>
           </a:p>
@@ -9235,7 +9239,7 @@
           <a:p>
             <a:fld id="{5B9223C0-ACDA-4AC3-8556-9784E6854D03}" type="datetimeFigureOut">
               <a:rPr lang="he-IL" smtClean="0"/>
-              <a:t>כ"ב/טבת/תשפ"ו</a:t>
+              <a:t>כ"ג/טבת/תשפ"ו</a:t>
             </a:fld>
             <a:endParaRPr lang="he-IL"/>
           </a:p>
@@ -9523,7 +9527,7 @@
           <a:p>
             <a:fld id="{5B9223C0-ACDA-4AC3-8556-9784E6854D03}" type="datetimeFigureOut">
               <a:rPr lang="he-IL" smtClean="0"/>
-              <a:t>כ"ב/טבת/תשפ"ו</a:t>
+              <a:t>כ"ג/טבת/תשפ"ו</a:t>
             </a:fld>
             <a:endParaRPr lang="he-IL"/>
           </a:p>
@@ -9722,7 +9726,7 @@
           <a:p>
             <a:fld id="{5B9223C0-ACDA-4AC3-8556-9784E6854D03}" type="datetimeFigureOut">
               <a:rPr lang="he-IL" smtClean="0"/>
-              <a:t>כ"ב/טבת/תשפ"ו</a:t>
+              <a:t>כ"ג/טבת/תשפ"ו</a:t>
             </a:fld>
             <a:endParaRPr lang="he-IL"/>
           </a:p>
@@ -9931,7 +9935,7 @@
           <a:p>
             <a:fld id="{5B9223C0-ACDA-4AC3-8556-9784E6854D03}" type="datetimeFigureOut">
               <a:rPr lang="he-IL" smtClean="0"/>
-              <a:t>כ"ב/טבת/תשפ"ו</a:t>
+              <a:t>כ"ג/טבת/תשפ"ו</a:t>
             </a:fld>
             <a:endParaRPr lang="he-IL"/>
           </a:p>
@@ -10152,7 +10156,7 @@
           <a:p>
             <a:fld id="{C69C400A-5848-4244-BE3C-E54188CFAC33}" type="datetimeFigureOut">
               <a:rPr lang="he-IL" smtClean="0"/>
-              <a:t>כ"ב/טבת/תשפ"ו</a:t>
+              <a:t>כ"ג/טבת/תשפ"ו</a:t>
             </a:fld>
             <a:endParaRPr lang="he-IL"/>
           </a:p>
@@ -10351,7 +10355,7 @@
           <a:p>
             <a:fld id="{C69C400A-5848-4244-BE3C-E54188CFAC33}" type="datetimeFigureOut">
               <a:rPr lang="he-IL" smtClean="0"/>
-              <a:t>כ"ב/טבת/תשפ"ו</a:t>
+              <a:t>כ"ג/טבת/תשפ"ו</a:t>
             </a:fld>
             <a:endParaRPr lang="he-IL"/>
           </a:p>
@@ -10626,7 +10630,7 @@
           <a:p>
             <a:fld id="{C69C400A-5848-4244-BE3C-E54188CFAC33}" type="datetimeFigureOut">
               <a:rPr lang="he-IL" smtClean="0"/>
-              <a:t>כ"ב/טבת/תשפ"ו</a:t>
+              <a:t>כ"ג/טבת/תשפ"ו</a:t>
             </a:fld>
             <a:endParaRPr lang="he-IL"/>
           </a:p>
@@ -10893,7 +10897,7 @@
           <a:p>
             <a:fld id="{C69C400A-5848-4244-BE3C-E54188CFAC33}" type="datetimeFigureOut">
               <a:rPr lang="he-IL" smtClean="0"/>
-              <a:t>כ"ב/טבת/תשפ"ו</a:t>
+              <a:t>כ"ג/טבת/תשפ"ו</a:t>
             </a:fld>
             <a:endParaRPr lang="he-IL"/>
           </a:p>
@@ -11307,7 +11311,7 @@
           <a:p>
             <a:fld id="{C69C400A-5848-4244-BE3C-E54188CFAC33}" type="datetimeFigureOut">
               <a:rPr lang="he-IL" smtClean="0"/>
-              <a:t>כ"ב/טבת/תשפ"ו</a:t>
+              <a:t>כ"ג/טבת/תשפ"ו</a:t>
             </a:fld>
             <a:endParaRPr lang="he-IL"/>
           </a:p>
@@ -11448,7 +11452,7 @@
           <a:p>
             <a:fld id="{C69C400A-5848-4244-BE3C-E54188CFAC33}" type="datetimeFigureOut">
               <a:rPr lang="he-IL" smtClean="0"/>
-              <a:t>כ"ב/טבת/תשפ"ו</a:t>
+              <a:t>כ"ג/טבת/תשפ"ו</a:t>
             </a:fld>
             <a:endParaRPr lang="he-IL"/>
           </a:p>
@@ -11826,7 +11830,7 @@
           <a:p>
             <a:fld id="{C69C400A-5848-4244-BE3C-E54188CFAC33}" type="datetimeFigureOut">
               <a:rPr lang="he-IL" smtClean="0"/>
-              <a:t>כ"ב/טבת/תשפ"ו</a:t>
+              <a:t>כ"ג/טבת/תשפ"ו</a:t>
             </a:fld>
             <a:endParaRPr lang="he-IL"/>
           </a:p>
@@ -12138,7 +12142,7 @@
           <a:p>
             <a:fld id="{C69C400A-5848-4244-BE3C-E54188CFAC33}" type="datetimeFigureOut">
               <a:rPr lang="he-IL" smtClean="0"/>
-              <a:t>כ"ב/טבת/תשפ"ו</a:t>
+              <a:t>כ"ג/טבת/תשפ"ו</a:t>
             </a:fld>
             <a:endParaRPr lang="he-IL"/>
           </a:p>
@@ -12426,7 +12430,7 @@
           <a:p>
             <a:fld id="{C69C400A-5848-4244-BE3C-E54188CFAC33}" type="datetimeFigureOut">
               <a:rPr lang="he-IL" smtClean="0"/>
-              <a:t>כ"ב/טבת/תשפ"ו</a:t>
+              <a:t>כ"ג/טבת/תשפ"ו</a:t>
             </a:fld>
             <a:endParaRPr lang="he-IL"/>
           </a:p>
@@ -12625,7 +12629,7 @@
           <a:p>
             <a:fld id="{C69C400A-5848-4244-BE3C-E54188CFAC33}" type="datetimeFigureOut">
               <a:rPr lang="he-IL" smtClean="0"/>
-              <a:t>כ"ב/טבת/תשפ"ו</a:t>
+              <a:t>כ"ג/טבת/תשפ"ו</a:t>
             </a:fld>
             <a:endParaRPr lang="he-IL"/>
           </a:p>
@@ -12834,7 +12838,7 @@
           <a:p>
             <a:fld id="{C69C400A-5848-4244-BE3C-E54188CFAC33}" type="datetimeFigureOut">
               <a:rPr lang="he-IL" smtClean="0"/>
-              <a:t>כ"ב/טבת/תשפ"ו</a:t>
+              <a:t>כ"ג/טבת/תשפ"ו</a:t>
             </a:fld>
             <a:endParaRPr lang="he-IL"/>
           </a:p>
@@ -13055,7 +13059,7 @@
           <a:p>
             <a:fld id="{7D861434-AF9A-4E4F-AB78-99737C8F54E8}" type="datetimeFigureOut">
               <a:rPr lang="he-IL" smtClean="0"/>
-              <a:t>כ"ב/טבת/תשפ"ו</a:t>
+              <a:t>כ"ג/טבת/תשפ"ו</a:t>
             </a:fld>
             <a:endParaRPr lang="he-IL"/>
           </a:p>
@@ -13254,7 +13258,7 @@
           <a:p>
             <a:fld id="{7D861434-AF9A-4E4F-AB78-99737C8F54E8}" type="datetimeFigureOut">
               <a:rPr lang="he-IL" smtClean="0"/>
-              <a:t>כ"ב/טבת/תשפ"ו</a:t>
+              <a:t>כ"ג/טבת/תשפ"ו</a:t>
             </a:fld>
             <a:endParaRPr lang="he-IL"/>
           </a:p>
@@ -13529,7 +13533,7 @@
           <a:p>
             <a:fld id="{7D861434-AF9A-4E4F-AB78-99737C8F54E8}" type="datetimeFigureOut">
               <a:rPr lang="he-IL" smtClean="0"/>
-              <a:t>כ"ב/טבת/תשפ"ו</a:t>
+              <a:t>כ"ג/טבת/תשפ"ו</a:t>
             </a:fld>
             <a:endParaRPr lang="he-IL"/>
           </a:p>
@@ -13796,7 +13800,7 @@
           <a:p>
             <a:fld id="{7D861434-AF9A-4E4F-AB78-99737C8F54E8}" type="datetimeFigureOut">
               <a:rPr lang="he-IL" smtClean="0"/>
-              <a:t>כ"ב/טבת/תשפ"ו</a:t>
+              <a:t>כ"ג/טבת/תשפ"ו</a:t>
             </a:fld>
             <a:endParaRPr lang="he-IL"/>
           </a:p>
@@ -14210,7 +14214,7 @@
           <a:p>
             <a:fld id="{7D861434-AF9A-4E4F-AB78-99737C8F54E8}" type="datetimeFigureOut">
               <a:rPr lang="he-IL" smtClean="0"/>
-              <a:t>כ"ב/טבת/תשפ"ו</a:t>
+              <a:t>כ"ג/טבת/תשפ"ו</a:t>
             </a:fld>
             <a:endParaRPr lang="he-IL"/>
           </a:p>
@@ -14764,7 +14768,7 @@
           <a:p>
             <a:fld id="{7D861434-AF9A-4E4F-AB78-99737C8F54E8}" type="datetimeFigureOut">
               <a:rPr lang="he-IL" smtClean="0"/>
-              <a:t>כ"ב/טבת/תשפ"ו</a:t>
+              <a:t>כ"ג/טבת/תשפ"ו</a:t>
             </a:fld>
             <a:endParaRPr lang="he-IL"/>
           </a:p>
@@ -14876,7 +14880,7 @@
           <a:p>
             <a:fld id="{7D861434-AF9A-4E4F-AB78-99737C8F54E8}" type="datetimeFigureOut">
               <a:rPr lang="he-IL" smtClean="0"/>
-              <a:t>כ"ב/טבת/תשפ"ו</a:t>
+              <a:t>כ"ג/טבת/תשפ"ו</a:t>
             </a:fld>
             <a:endParaRPr lang="he-IL"/>
           </a:p>
@@ -15188,7 +15192,7 @@
           <a:p>
             <a:fld id="{7D861434-AF9A-4E4F-AB78-99737C8F54E8}" type="datetimeFigureOut">
               <a:rPr lang="he-IL" smtClean="0"/>
-              <a:t>כ"ב/טבת/תשפ"ו</a:t>
+              <a:t>כ"ג/טבת/תשפ"ו</a:t>
             </a:fld>
             <a:endParaRPr lang="he-IL"/>
           </a:p>
@@ -15476,7 +15480,7 @@
           <a:p>
             <a:fld id="{7D861434-AF9A-4E4F-AB78-99737C8F54E8}" type="datetimeFigureOut">
               <a:rPr lang="he-IL" smtClean="0"/>
-              <a:t>כ"ב/טבת/תשפ"ו</a:t>
+              <a:t>כ"ג/טבת/תשפ"ו</a:t>
             </a:fld>
             <a:endParaRPr lang="he-IL"/>
           </a:p>
@@ -15675,7 +15679,7 @@
           <a:p>
             <a:fld id="{7D861434-AF9A-4E4F-AB78-99737C8F54E8}" type="datetimeFigureOut">
               <a:rPr lang="he-IL" smtClean="0"/>
-              <a:t>כ"ב/טבת/תשפ"ו</a:t>
+              <a:t>כ"ג/טבת/תשפ"ו</a:t>
             </a:fld>
             <a:endParaRPr lang="he-IL"/>
           </a:p>
@@ -15884,7 +15888,7 @@
           <a:p>
             <a:fld id="{7D861434-AF9A-4E4F-AB78-99737C8F54E8}" type="datetimeFigureOut">
               <a:rPr lang="he-IL" smtClean="0"/>
-              <a:t>כ"ב/טבת/תשפ"ו</a:t>
+              <a:t>כ"ג/טבת/תשפ"ו</a:t>
             </a:fld>
             <a:endParaRPr lang="he-IL"/>
           </a:p>
@@ -17561,7 +17565,7 @@
           <a:p>
             <a:fld id="{9602BFBB-AED6-48E7-B614-F286ADCBB66A}" type="datetimeFigureOut">
               <a:rPr lang="he-IL" smtClean="0"/>
-              <a:t>כ"ב/טבת/תשפ"ו</a:t>
+              <a:t>כ"ג/טבת/תשפ"ו</a:t>
             </a:fld>
             <a:endParaRPr lang="he-IL"/>
           </a:p>
@@ -18125,7 +18129,7 @@
           <a:p>
             <a:fld id="{5B9223C0-ACDA-4AC3-8556-9784E6854D03}" type="datetimeFigureOut">
               <a:rPr lang="he-IL" smtClean="0"/>
-              <a:t>כ"ב/טבת/תשפ"ו</a:t>
+              <a:t>כ"ג/טבת/תשפ"ו</a:t>
             </a:fld>
             <a:endParaRPr lang="he-IL"/>
           </a:p>
@@ -18689,7 +18693,7 @@
           <a:p>
             <a:fld id="{C69C400A-5848-4244-BE3C-E54188CFAC33}" type="datetimeFigureOut">
               <a:rPr lang="he-IL" smtClean="0"/>
-              <a:t>כ"ב/טבת/תשפ"ו</a:t>
+              <a:t>כ"ג/טבת/תשפ"ו</a:t>
             </a:fld>
             <a:endParaRPr lang="he-IL"/>
           </a:p>
@@ -19253,7 +19257,7 @@
           <a:p>
             <a:fld id="{7D861434-AF9A-4E4F-AB78-99737C8F54E8}" type="datetimeFigureOut">
               <a:rPr lang="he-IL" smtClean="0"/>
-              <a:t>כ"ב/טבת/תשפ"ו</a:t>
+              <a:t>כ"ג/טבת/תשפ"ו</a:t>
             </a:fld>
             <a:endParaRPr lang="he-IL"/>
           </a:p>
@@ -19745,7 +19749,7 @@
       </p:sp>
       <p:pic>
         <p:nvPicPr>
-          <p:cNvPr id="3" name="">
+          <p:cNvPr id="3" name="Picture 2">
             <a:extLst>
               <a:ext uri="{FF2B5EF4-FFF2-40B4-BE49-F238E27FC236}">
                 <a16:creationId xmlns:a16="http://schemas.microsoft.com/office/drawing/2014/main" id="{B8648024-EC55-00D7-1136-0AB1E3A6260A}"/>
@@ -20098,81 +20102,6 @@
 </file>
 
 <file path=ppt/slides/slide11.xml><?xml version="1.0" encoding="utf-8"?>
-<p:sld xmlns:a="http://schemas.openxmlformats.org/drawingml/2006/main" xmlns:r="http://schemas.openxmlformats.org/officeDocument/2006/relationships" xmlns:p="http://schemas.openxmlformats.org/presentationml/2006/main">
-  <p:cSld>
-    <p:spTree>
-      <p:nvGrpSpPr>
-        <p:cNvPr id="1" name=""/>
-        <p:cNvGrpSpPr/>
-        <p:nvPr/>
-      </p:nvGrpSpPr>
-      <p:grpSpPr>
-        <a:xfrm>
-          <a:off x="0" y="0"/>
-          <a:ext cx="0" cy="0"/>
-          <a:chOff x="0" y="0"/>
-          <a:chExt cx="0" cy="0"/>
-        </a:xfrm>
-      </p:grpSpPr>
-      <p:sp>
-        <p:nvSpPr>
-          <p:cNvPr id="2" name="Title 1">
-            <a:extLst>
-              <a:ext uri="{FF2B5EF4-FFF2-40B4-BE49-F238E27FC236}">
-                <a16:creationId xmlns:a16="http://schemas.microsoft.com/office/drawing/2014/main" id="{EB9A1E06-3EA0-0E1F-BE35-39F68B59C4B3}"/>
-              </a:ext>
-            </a:extLst>
-          </p:cNvPr>
-          <p:cNvSpPr>
-            <a:spLocks noGrp="1"/>
-          </p:cNvSpPr>
-          <p:nvPr>
-            <p:ph type="ctrTitle"/>
-          </p:nvPr>
-        </p:nvSpPr>
-        <p:spPr/>
-        <p:txBody>
-          <a:bodyPr/>
-          <a:lstStyle/>
-          <a:p>
-            <a:endParaRPr lang="he-IL"/>
-          </a:p>
-        </p:txBody>
-      </p:sp>
-      <p:sp>
-        <p:nvSpPr>
-          <p:cNvPr id="3" name="Subtitle 2">
-            <a:extLst>
-              <a:ext uri="{FF2B5EF4-FFF2-40B4-BE49-F238E27FC236}">
-                <a16:creationId xmlns:a16="http://schemas.microsoft.com/office/drawing/2014/main" id="{842DAFCA-FA7B-0015-2CCA-078A69B16ACE}"/>
-              </a:ext>
-            </a:extLst>
-          </p:cNvPr>
-          <p:cNvSpPr>
-            <a:spLocks noGrp="1"/>
-          </p:cNvSpPr>
-          <p:nvPr>
-            <p:ph type="subTitle" idx="1"/>
-          </p:nvPr>
-        </p:nvSpPr>
-        <p:spPr/>
-        <p:txBody>
-          <a:bodyPr/>
-          <a:lstStyle/>
-          <a:p>
-            <a:endParaRPr lang="he-IL"/>
-          </a:p>
-        </p:txBody>
-      </p:sp>
-    </p:spTree>
-  </p:cSld>
-  <p:clrMapOvr>
-    <a:masterClrMapping/>
-  </p:clrMapOvr>
-</p:sld>
-</file>
-
-<file path=ppt/slides/slide12.xml><?xml version="1.0" encoding="utf-8"?>
 <p:sld xmlns:a="http://schemas.openxmlformats.org/drawingml/2006/main" xmlns:r="http://schemas.openxmlformats.org/officeDocument/2006/relationships" xmlns:p="http://schemas.openxmlformats.org/presentationml/2006/main">
   <p:cSld name="page13">
     <p:spTree>
@@ -22533,7 +22462,7 @@
 </p:sld>
 </file>
 
-<file path=ppt/slides/slide13.xml><?xml version="1.0" encoding="utf-8"?>
+<file path=ppt/slides/slide12.xml><?xml version="1.0" encoding="utf-8"?>
 <p:sld xmlns:a="http://schemas.openxmlformats.org/drawingml/2006/main" xmlns:r="http://schemas.openxmlformats.org/officeDocument/2006/relationships" xmlns:p="http://schemas.openxmlformats.org/presentationml/2006/main">
   <p:cSld name="page14">
     <p:spTree>
@@ -25236,7 +25165,7 @@
 </p:sld>
 </file>
 
-<file path=ppt/slides/slide14.xml><?xml version="1.0" encoding="utf-8"?>
+<file path=ppt/slides/slide13.xml><?xml version="1.0" encoding="utf-8"?>
 <p:sld xmlns:a="http://schemas.openxmlformats.org/drawingml/2006/main" xmlns:r="http://schemas.openxmlformats.org/officeDocument/2006/relationships" xmlns:p="http://schemas.openxmlformats.org/presentationml/2006/main">
   <p:cSld name="page15">
     <p:spTree>
@@ -25368,6 +25297,203 @@
             <a:extLst>
               <a:ext uri="{FF2B5EF4-FFF2-40B4-BE49-F238E27FC236}">
                 <a16:creationId xmlns:a16="http://schemas.microsoft.com/office/drawing/2014/main" id="{34BE3049-476F-49DA-58FE-159FDC527F5A}"/>
+              </a:ext>
+            </a:extLst>
+          </p:cNvPr>
+          <p:cNvPicPr>
+            <a:picLocks noChangeAspect="1"/>
+          </p:cNvPicPr>
+          <p:nvPr/>
+        </p:nvPicPr>
+        <p:blipFill>
+          <a:blip r:embed="rId3"/>
+          <a:stretch>
+            <a:fillRect/>
+          </a:stretch>
+        </p:blipFill>
+        <p:spPr>
+          <a:xfrm>
+            <a:off x="1865370" y="3779837"/>
+            <a:ext cx="7059010" cy="3334215"/>
+          </a:xfrm>
+          <a:prstGeom prst="rect">
+            <a:avLst/>
+          </a:prstGeom>
+        </p:spPr>
+      </p:pic>
+    </p:spTree>
+  </p:cSld>
+  <p:clrMapOvr>
+    <a:masterClrMapping/>
+  </p:clrMapOvr>
+</p:sld>
+</file>
+
+<file path=ppt/slides/slide14.xml><?xml version="1.0" encoding="utf-8"?>
+<p:sld xmlns:a="http://schemas.openxmlformats.org/drawingml/2006/main" xmlns:r="http://schemas.openxmlformats.org/officeDocument/2006/relationships" xmlns:p="http://schemas.openxmlformats.org/presentationml/2006/main">
+  <p:cSld name="page16">
+    <p:spTree>
+      <p:nvGrpSpPr>
+        <p:cNvPr id="1" name=""/>
+        <p:cNvGrpSpPr/>
+        <p:nvPr/>
+      </p:nvGrpSpPr>
+      <p:grpSpPr>
+        <a:xfrm>
+          <a:off x="0" y="0"/>
+          <a:ext cx="0" cy="0"/>
+          <a:chOff x="0" y="0"/>
+          <a:chExt cx="0" cy="0"/>
+        </a:xfrm>
+      </p:grpSpPr>
+      <p:sp>
+        <p:nvSpPr>
+          <p:cNvPr id="6" name="Title 5">
+            <a:extLst>
+              <a:ext uri="{FF2B5EF4-FFF2-40B4-BE49-F238E27FC236}">
+                <a16:creationId xmlns:a16="http://schemas.microsoft.com/office/drawing/2014/main" id="{DA69DE82-F460-483B-CBD2-447977E4C7D4}"/>
+              </a:ext>
+            </a:extLst>
+          </p:cNvPr>
+          <p:cNvSpPr txBox="1">
+            <a:spLocks noGrp="1"/>
+          </p:cNvSpPr>
+          <p:nvPr>
+            <p:ph type="title" idx="4294967295"/>
+          </p:nvPr>
+        </p:nvSpPr>
+        <p:spPr>
+          <a:xfrm>
+            <a:off x="503280" y="251280"/>
+            <a:ext cx="8734319" cy="1008359"/>
+          </a:xfrm>
+        </p:spPr>
+        <p:txBody>
+          <a:bodyPr vert="horz"/>
+          <a:lstStyle/>
+          <a:p>
+            <a:pPr lvl="0" rtl="1"/>
+            <a:r>
+              <a:rPr lang="he-IL" b="1">
+                <a:latin typeface="Liberation Sans" pitchFamily="34"/>
+                <a:cs typeface="Liberation Sans" pitchFamily="34"/>
+              </a:rPr>
+              <a:t>מציאת שידוך גדול ביותר - עדיפויות</a:t>
+            </a:r>
+          </a:p>
+        </p:txBody>
+      </p:sp>
+      <p:sp>
+        <p:nvSpPr>
+          <p:cNvPr id="26" name="TextBox 25">
+            <a:extLst>
+              <a:ext uri="{FF2B5EF4-FFF2-40B4-BE49-F238E27FC236}">
+                <a16:creationId xmlns:a16="http://schemas.microsoft.com/office/drawing/2014/main" id="{0DF33F18-D0A7-CE9C-6C2C-5D3B6D41917E}"/>
+              </a:ext>
+            </a:extLst>
+          </p:cNvPr>
+          <p:cNvSpPr txBox="1"/>
+          <p:nvPr/>
+        </p:nvSpPr>
+        <p:spPr>
+          <a:xfrm>
+            <a:off x="133350" y="1280520"/>
+            <a:ext cx="9833609" cy="1683623"/>
+          </a:xfrm>
+          <a:prstGeom prst="rect">
+            <a:avLst/>
+          </a:prstGeom>
+          <a:noFill/>
+          <a:ln>
+            <a:noFill/>
+          </a:ln>
+        </p:spPr>
+        <p:txBody>
+          <a:bodyPr vert="horz" wrap="square" lIns="90000" tIns="45000" rIns="90000" bIns="45000" anchorCtr="0" compatLnSpc="0">
+            <a:spAutoFit/>
+          </a:bodyPr>
+          <a:lstStyle/>
+          <a:p>
+            <a:pPr marL="0" marR="0" lvl="0" indent="0" algn="r" rtl="1" hangingPunct="0">
+              <a:lnSpc>
+                <a:spcPct val="100000"/>
+              </a:lnSpc>
+              <a:spcBef>
+                <a:spcPts val="0"/>
+              </a:spcBef>
+              <a:spcAft>
+                <a:spcPts val="0"/>
+              </a:spcAft>
+              <a:buNone/>
+              <a:tabLst/>
+            </a:pPr>
+            <a:r>
+              <a:rPr lang="he-IL" sz="3600" b="0" i="0" u="none" strike="noStrike" kern="1200" cap="none">
+                <a:ln>
+                  <a:noFill/>
+                </a:ln>
+                <a:latin typeface="Liberation Sans" pitchFamily="34"/>
+                <a:ea typeface="Noto Sans CJK SC Regular" pitchFamily="2"/>
+                <a:cs typeface="Liberation Sans" pitchFamily="34"/>
+              </a:rPr>
+              <a:t>האלגוריתם הקיים מוצא שידוך שבו </a:t>
+            </a:r>
+            <a:r>
+              <a:rPr lang="he-IL" sz="3600" b="1" i="0" u="none" strike="noStrike" kern="1200" cap="none">
+                <a:ln>
+                  <a:noFill/>
+                </a:ln>
+                <a:latin typeface="Liberation Sans" pitchFamily="34"/>
+                <a:ea typeface="Noto Sans CJK SC Regular" pitchFamily="2"/>
+                <a:cs typeface="Liberation Sans" pitchFamily="34"/>
+              </a:rPr>
+              <a:t>סכום המשקלים</a:t>
+            </a:r>
+            <a:r>
+              <a:rPr lang="en-US" sz="3600" b="0" i="0" u="none" strike="noStrike" kern="1200" cap="none">
+                <a:ln>
+                  <a:noFill/>
+                </a:ln>
+                <a:latin typeface="Liberation Sans" pitchFamily="34"/>
+                <a:ea typeface="Noto Sans CJK SC Regular" pitchFamily="2"/>
+                <a:cs typeface="Liberation Sans" pitchFamily="34"/>
+              </a:rPr>
+              <a:t> הוא הגדול ביותר</a:t>
+            </a:r>
+            <a:r>
+              <a:rPr lang="he-IL" sz="3600" b="0" i="0" u="none" strike="noStrike" kern="1200" cap="none">
+                <a:ln>
+                  <a:noFill/>
+                </a:ln>
+                <a:latin typeface="Liberation Sans" pitchFamily="34"/>
+                <a:ea typeface="Noto Sans CJK SC Regular" pitchFamily="2"/>
+                <a:cs typeface="Liberation Sans" pitchFamily="34"/>
+              </a:rPr>
+              <a:t>. </a:t>
+            </a:r>
+            <a:r>
+              <a:rPr lang="he-IL" sz="3600" b="0" i="0" u="none" strike="noStrike" kern="1200" cap="none">
+                <a:ln>
+                  <a:noFill/>
+                </a:ln>
+                <a:solidFill>
+                  <a:srgbClr val="800080"/>
+                </a:solidFill>
+                <a:latin typeface="Liberation Sans" pitchFamily="34"/>
+                <a:ea typeface="Noto Sans CJK SC Regular" pitchFamily="2"/>
+                <a:cs typeface="Liberation Sans" pitchFamily="34"/>
+              </a:rPr>
+              <a:t>איך נתאים אותו לעדיפויות?</a:t>
+            </a:r>
+          </a:p>
+        </p:txBody>
+      </p:sp>
+      <p:pic>
+        <p:nvPicPr>
+          <p:cNvPr id="30" name="Picture 29" descr="A diagram of a network&#10;&#10;AI-generated content may be incorrect.">
+            <a:extLst>
+              <a:ext uri="{FF2B5EF4-FFF2-40B4-BE49-F238E27FC236}">
+                <a16:creationId xmlns:a16="http://schemas.microsoft.com/office/drawing/2014/main" id="{722C0975-1D8C-7701-29C5-E19C28AC51BA}"/>
               </a:ext>
             </a:extLst>
           </p:cNvPr>
@@ -25402,203 +25528,6 @@
 
 <file path=ppt/slides/slide15.xml><?xml version="1.0" encoding="utf-8"?>
 <p:sld xmlns:a="http://schemas.openxmlformats.org/drawingml/2006/main" xmlns:r="http://schemas.openxmlformats.org/officeDocument/2006/relationships" xmlns:p="http://schemas.openxmlformats.org/presentationml/2006/main">
-  <p:cSld name="page16">
-    <p:spTree>
-      <p:nvGrpSpPr>
-        <p:cNvPr id="1" name=""/>
-        <p:cNvGrpSpPr/>
-        <p:nvPr/>
-      </p:nvGrpSpPr>
-      <p:grpSpPr>
-        <a:xfrm>
-          <a:off x="0" y="0"/>
-          <a:ext cx="0" cy="0"/>
-          <a:chOff x="0" y="0"/>
-          <a:chExt cx="0" cy="0"/>
-        </a:xfrm>
-      </p:grpSpPr>
-      <p:sp>
-        <p:nvSpPr>
-          <p:cNvPr id="6" name="Title 5">
-            <a:extLst>
-              <a:ext uri="{FF2B5EF4-FFF2-40B4-BE49-F238E27FC236}">
-                <a16:creationId xmlns:a16="http://schemas.microsoft.com/office/drawing/2014/main" id="{DA69DE82-F460-483B-CBD2-447977E4C7D4}"/>
-              </a:ext>
-            </a:extLst>
-          </p:cNvPr>
-          <p:cNvSpPr txBox="1">
-            <a:spLocks noGrp="1"/>
-          </p:cNvSpPr>
-          <p:nvPr>
-            <p:ph type="title" idx="4294967295"/>
-          </p:nvPr>
-        </p:nvSpPr>
-        <p:spPr>
-          <a:xfrm>
-            <a:off x="503280" y="251280"/>
-            <a:ext cx="8734319" cy="1008359"/>
-          </a:xfrm>
-        </p:spPr>
-        <p:txBody>
-          <a:bodyPr vert="horz"/>
-          <a:lstStyle/>
-          <a:p>
-            <a:pPr lvl="0" rtl="1"/>
-            <a:r>
-              <a:rPr lang="he-IL" b="1">
-                <a:latin typeface="Liberation Sans" pitchFamily="34"/>
-                <a:cs typeface="Liberation Sans" pitchFamily="34"/>
-              </a:rPr>
-              <a:t>מציאת שידוך גדול ביותר - עדיפויות</a:t>
-            </a:r>
-          </a:p>
-        </p:txBody>
-      </p:sp>
-      <p:sp>
-        <p:nvSpPr>
-          <p:cNvPr id="26" name="TextBox 25">
-            <a:extLst>
-              <a:ext uri="{FF2B5EF4-FFF2-40B4-BE49-F238E27FC236}">
-                <a16:creationId xmlns:a16="http://schemas.microsoft.com/office/drawing/2014/main" id="{0DF33F18-D0A7-CE9C-6C2C-5D3B6D41917E}"/>
-              </a:ext>
-            </a:extLst>
-          </p:cNvPr>
-          <p:cNvSpPr txBox="1"/>
-          <p:nvPr/>
-        </p:nvSpPr>
-        <p:spPr>
-          <a:xfrm>
-            <a:off x="133350" y="1280520"/>
-            <a:ext cx="9833609" cy="1683623"/>
-          </a:xfrm>
-          <a:prstGeom prst="rect">
-            <a:avLst/>
-          </a:prstGeom>
-          <a:noFill/>
-          <a:ln>
-            <a:noFill/>
-          </a:ln>
-        </p:spPr>
-        <p:txBody>
-          <a:bodyPr vert="horz" wrap="square" lIns="90000" tIns="45000" rIns="90000" bIns="45000" anchorCtr="0" compatLnSpc="0">
-            <a:spAutoFit/>
-          </a:bodyPr>
-          <a:lstStyle/>
-          <a:p>
-            <a:pPr marL="0" marR="0" lvl="0" indent="0" algn="r" rtl="1" hangingPunct="0">
-              <a:lnSpc>
-                <a:spcPct val="100000"/>
-              </a:lnSpc>
-              <a:spcBef>
-                <a:spcPts val="0"/>
-              </a:spcBef>
-              <a:spcAft>
-                <a:spcPts val="0"/>
-              </a:spcAft>
-              <a:buNone/>
-              <a:tabLst/>
-            </a:pPr>
-            <a:r>
-              <a:rPr lang="he-IL" sz="3600" b="0" i="0" u="none" strike="noStrike" kern="1200" cap="none">
-                <a:ln>
-                  <a:noFill/>
-                </a:ln>
-                <a:latin typeface="Liberation Sans" pitchFamily="34"/>
-                <a:ea typeface="Noto Sans CJK SC Regular" pitchFamily="2"/>
-                <a:cs typeface="Liberation Sans" pitchFamily="34"/>
-              </a:rPr>
-              <a:t>האלגוריתם הקיים מוצא שידוך שבו </a:t>
-            </a:r>
-            <a:r>
-              <a:rPr lang="he-IL" sz="3600" b="1" i="0" u="none" strike="noStrike" kern="1200" cap="none">
-                <a:ln>
-                  <a:noFill/>
-                </a:ln>
-                <a:latin typeface="Liberation Sans" pitchFamily="34"/>
-                <a:ea typeface="Noto Sans CJK SC Regular" pitchFamily="2"/>
-                <a:cs typeface="Liberation Sans" pitchFamily="34"/>
-              </a:rPr>
-              <a:t>סכום המשקלים</a:t>
-            </a:r>
-            <a:r>
-              <a:rPr lang="en-US" sz="3600" b="0" i="0" u="none" strike="noStrike" kern="1200" cap="none">
-                <a:ln>
-                  <a:noFill/>
-                </a:ln>
-                <a:latin typeface="Liberation Sans" pitchFamily="34"/>
-                <a:ea typeface="Noto Sans CJK SC Regular" pitchFamily="2"/>
-                <a:cs typeface="Liberation Sans" pitchFamily="34"/>
-              </a:rPr>
-              <a:t> הוא הגדול ביותר</a:t>
-            </a:r>
-            <a:r>
-              <a:rPr lang="he-IL" sz="3600" b="0" i="0" u="none" strike="noStrike" kern="1200" cap="none">
-                <a:ln>
-                  <a:noFill/>
-                </a:ln>
-                <a:latin typeface="Liberation Sans" pitchFamily="34"/>
-                <a:ea typeface="Noto Sans CJK SC Regular" pitchFamily="2"/>
-                <a:cs typeface="Liberation Sans" pitchFamily="34"/>
-              </a:rPr>
-              <a:t>. </a:t>
-            </a:r>
-            <a:r>
-              <a:rPr lang="he-IL" sz="3600" b="0" i="0" u="none" strike="noStrike" kern="1200" cap="none">
-                <a:ln>
-                  <a:noFill/>
-                </a:ln>
-                <a:solidFill>
-                  <a:srgbClr val="800080"/>
-                </a:solidFill>
-                <a:latin typeface="Liberation Sans" pitchFamily="34"/>
-                <a:ea typeface="Noto Sans CJK SC Regular" pitchFamily="2"/>
-                <a:cs typeface="Liberation Sans" pitchFamily="34"/>
-              </a:rPr>
-              <a:t>איך נתאים אותו לעדיפויות?</a:t>
-            </a:r>
-          </a:p>
-        </p:txBody>
-      </p:sp>
-      <p:pic>
-        <p:nvPicPr>
-          <p:cNvPr id="30" name="Picture 29" descr="A diagram of a network&#10;&#10;AI-generated content may be incorrect.">
-            <a:extLst>
-              <a:ext uri="{FF2B5EF4-FFF2-40B4-BE49-F238E27FC236}">
-                <a16:creationId xmlns:a16="http://schemas.microsoft.com/office/drawing/2014/main" id="{722C0975-1D8C-7701-29C5-E19C28AC51BA}"/>
-              </a:ext>
-            </a:extLst>
-          </p:cNvPr>
-          <p:cNvPicPr>
-            <a:picLocks noChangeAspect="1"/>
-          </p:cNvPicPr>
-          <p:nvPr/>
-        </p:nvPicPr>
-        <p:blipFill>
-          <a:blip r:embed="rId3"/>
-          <a:stretch>
-            <a:fillRect/>
-          </a:stretch>
-        </p:blipFill>
-        <p:spPr>
-          <a:xfrm>
-            <a:off x="1865370" y="3779837"/>
-            <a:ext cx="7059010" cy="3334215"/>
-          </a:xfrm>
-          <a:prstGeom prst="rect">
-            <a:avLst/>
-          </a:prstGeom>
-        </p:spPr>
-      </p:pic>
-    </p:spTree>
-  </p:cSld>
-  <p:clrMapOvr>
-    <a:masterClrMapping/>
-  </p:clrMapOvr>
-</p:sld>
-</file>
-
-<file path=ppt/slides/slide16.xml><?xml version="1.0" encoding="utf-8"?>
-<p:sld xmlns:a="http://schemas.openxmlformats.org/drawingml/2006/main" xmlns:r="http://schemas.openxmlformats.org/officeDocument/2006/relationships" xmlns:p="http://schemas.openxmlformats.org/presentationml/2006/main">
   <p:cSld name="page17">
     <p:spTree>
       <p:nvGrpSpPr>
@@ -25902,7 +25831,7 @@
                 <a:ea typeface="Noto Sans CJK SC Regular" pitchFamily="2"/>
                 <a:cs typeface="Liberation Sans" pitchFamily="34"/>
               </a:rPr>
-              <a:t> &lt; </a:t>
+              <a:t> &gt; </a:t>
             </a:r>
             <a:r>
               <a:rPr lang="en-US" sz="3200" b="0" i="0" u="none" strike="noStrike" kern="1200" cap="none">
@@ -26057,7 +25986,7 @@
 </p:sld>
 </file>
 
-<file path=ppt/slides/slide17.xml><?xml version="1.0" encoding="utf-8"?>
+<file path=ppt/slides/slide16.xml><?xml version="1.0" encoding="utf-8"?>
 <p:sld xmlns:a="http://schemas.openxmlformats.org/drawingml/2006/main" xmlns:r="http://schemas.openxmlformats.org/officeDocument/2006/relationships" xmlns:p="http://schemas.openxmlformats.org/presentationml/2006/main">
   <p:cSld name="page24">
     <p:spTree>
@@ -26076,7 +26005,7 @@
       </p:grpSpPr>
       <p:pic>
         <p:nvPicPr>
-          <p:cNvPr id="2" name="">
+          <p:cNvPr id="2" name="Picture 1">
             <a:extLst>
               <a:ext uri="{FF2B5EF4-FFF2-40B4-BE49-F238E27FC236}">
                 <a16:creationId xmlns:a16="http://schemas.microsoft.com/office/drawing/2014/main" id="{7664D3AD-744D-74AB-FEC1-723BB719B057}"/>
@@ -26304,7 +26233,7 @@
 </p:sld>
 </file>
 
-<file path=ppt/slides/slide18.xml><?xml version="1.0" encoding="utf-8"?>
+<file path=ppt/slides/slide17.xml><?xml version="1.0" encoding="utf-8"?>
 <p:sld xmlns:a="http://schemas.openxmlformats.org/drawingml/2006/main" xmlns:r="http://schemas.openxmlformats.org/officeDocument/2006/relationships" xmlns:p="http://schemas.openxmlformats.org/presentationml/2006/main">
   <p:cSld name="page25">
     <p:spTree>
@@ -26738,7 +26667,7 @@
       </p:sp>
       <p:pic>
         <p:nvPicPr>
-          <p:cNvPr id="4" name="">
+          <p:cNvPr id="4" name="Picture 3">
             <a:extLst>
               <a:ext uri="{FF2B5EF4-FFF2-40B4-BE49-F238E27FC236}">
                 <a16:creationId xmlns:a16="http://schemas.microsoft.com/office/drawing/2014/main" id="{D8E70EEC-6078-6DF0-C673-E5720DF588EA}"/>
@@ -26977,7 +26906,7 @@
 </p:sld>
 </file>
 
-<file path=ppt/slides/slide19.xml><?xml version="1.0" encoding="utf-8"?>
+<file path=ppt/slides/slide18.xml><?xml version="1.0" encoding="utf-8"?>
 <p:sld xmlns:a="http://schemas.openxmlformats.org/drawingml/2006/main" xmlns:r="http://schemas.openxmlformats.org/officeDocument/2006/relationships" xmlns:p="http://schemas.openxmlformats.org/presentationml/2006/main">
   <p:cSld name="page26">
     <p:spTree>
@@ -27123,7 +27052,49 @@
                 <a:ea typeface="Noto Sans CJK SC Regular" pitchFamily="2"/>
                 <a:cs typeface="Liberation Sans" pitchFamily="34"/>
               </a:rPr>
-              <a:t>למצוא אוסף של מעגלי-החלפה זרים באורך לכל היותר L</a:t>
+              <a:t>למצוא אוסף של </a:t>
+            </a:r>
+            <a:r>
+              <a:rPr lang="he-IL" sz="4000" b="0" i="0" u="none" strike="noStrike" kern="1200" cap="none">
+                <a:ln>
+                  <a:noFill/>
+                </a:ln>
+                <a:solidFill>
+                  <a:srgbClr val="5983B0"/>
+                </a:solidFill>
+                <a:latin typeface="Liberation Sans" pitchFamily="34"/>
+                <a:ea typeface="Noto Sans CJK SC Regular" pitchFamily="2"/>
+                <a:cs typeface="Liberation Sans" pitchFamily="34"/>
+              </a:rPr>
+              <a:t>מעגלים מכוונים </a:t>
+            </a:r>
+            <a:r>
+              <a:rPr lang="en-US" sz="4000" b="1" i="0" u="none" strike="noStrike" kern="1200" cap="none">
+                <a:ln>
+                  <a:noFill/>
+                </a:ln>
+                <a:solidFill>
+                  <a:srgbClr val="5983B0"/>
+                </a:solidFill>
+                <a:latin typeface="Liberation Sans" pitchFamily="34"/>
+                <a:ea typeface="Noto Sans CJK SC Regular" pitchFamily="2"/>
+                <a:cs typeface="Liberation Sans" pitchFamily="34"/>
+              </a:rPr>
+              <a:t>זרים </a:t>
+            </a:r>
+            <a:r>
+              <a:rPr lang="en-US" sz="4000" b="0" i="0" u="none" strike="noStrike" kern="1200" cap="none">
+                <a:ln>
+                  <a:noFill/>
+                </a:ln>
+                <a:solidFill>
+                  <a:srgbClr val="5983B0"/>
+                </a:solidFill>
+                <a:latin typeface="Liberation Sans" pitchFamily="34"/>
+                <a:ea typeface="Noto Sans CJK SC Regular" pitchFamily="2"/>
+                <a:cs typeface="Liberation Sans" pitchFamily="34"/>
+              </a:rPr>
+              <a:t>באורך לכל היותר L</a:t>
             </a:r>
             <a:r>
               <a:rPr lang="he-IL" sz="4000" b="0" i="0" u="none" strike="noStrike" kern="1200" cap="none">
@@ -27320,7 +27291,7 @@
       </p:sp>
       <p:pic>
         <p:nvPicPr>
-          <p:cNvPr id="4" name="">
+          <p:cNvPr id="4" name="Picture 3">
             <a:extLst>
               <a:ext uri="{FF2B5EF4-FFF2-40B4-BE49-F238E27FC236}">
                 <a16:creationId xmlns:a16="http://schemas.microsoft.com/office/drawing/2014/main" id="{8A23AAF3-ADC4-B5D3-F154-666F613C50E5}"/>
@@ -27529,6 +27500,271 @@
 </p:sld>
 </file>
 
+<file path=ppt/slides/slide19.xml><?xml version="1.0" encoding="utf-8"?>
+<p:sld xmlns:a="http://schemas.openxmlformats.org/drawingml/2006/main" xmlns:r="http://schemas.openxmlformats.org/officeDocument/2006/relationships" xmlns:p="http://schemas.openxmlformats.org/presentationml/2006/main">
+  <p:cSld name="page27">
+    <p:spTree>
+      <p:nvGrpSpPr>
+        <p:cNvPr id="1" name=""/>
+        <p:cNvGrpSpPr/>
+        <p:nvPr/>
+      </p:nvGrpSpPr>
+      <p:grpSpPr>
+        <a:xfrm>
+          <a:off x="0" y="0"/>
+          <a:ext cx="0" cy="0"/>
+          <a:chOff x="0" y="0"/>
+          <a:chExt cx="0" cy="0"/>
+        </a:xfrm>
+      </p:grpSpPr>
+      <p:sp>
+        <p:nvSpPr>
+          <p:cNvPr id="2" name="Title 1">
+            <a:extLst>
+              <a:ext uri="{FF2B5EF4-FFF2-40B4-BE49-F238E27FC236}">
+                <a16:creationId xmlns:a16="http://schemas.microsoft.com/office/drawing/2014/main" id="{D919ADE2-6E38-0D70-AD43-A601348FBF33}"/>
+              </a:ext>
+            </a:extLst>
+          </p:cNvPr>
+          <p:cNvSpPr txBox="1">
+            <a:spLocks noGrp="1"/>
+          </p:cNvSpPr>
+          <p:nvPr>
+            <p:ph type="title" idx="4294967295"/>
+          </p:nvPr>
+        </p:nvSpPr>
+        <p:spPr>
+          <a:xfrm>
+            <a:off x="182880" y="130320"/>
+            <a:ext cx="9897119" cy="1250280"/>
+          </a:xfrm>
+        </p:spPr>
+        <p:txBody>
+          <a:bodyPr vert="horz"/>
+          <a:lstStyle/>
+          <a:p>
+            <a:pPr lvl="0" rtl="1"/>
+            <a:r>
+              <a:rPr lang="he-IL" b="1">
+                <a:latin typeface="Liberation Sans" pitchFamily="34"/>
+                <a:cs typeface="Liberation Sans" pitchFamily="34"/>
+              </a:rPr>
+              <a:t>מעגלי-החלפה באורך </a:t>
+            </a:r>
+            <a:r>
+              <a:rPr lang="en-US" b="1">
+                <a:latin typeface="Liberation Sans" pitchFamily="34"/>
+                <a:cs typeface="Liberation Sans" pitchFamily="34"/>
+              </a:rPr>
+              <a:t>L</a:t>
+            </a:r>
+          </a:p>
+        </p:txBody>
+      </p:sp>
+      <p:sp>
+        <p:nvSpPr>
+          <p:cNvPr id="3" name="TextBox 2">
+            <a:extLst>
+              <a:ext uri="{FF2B5EF4-FFF2-40B4-BE49-F238E27FC236}">
+                <a16:creationId xmlns:a16="http://schemas.microsoft.com/office/drawing/2014/main" id="{C7DDC49F-CC1E-CE3E-311D-4948CA1613EE}"/>
+              </a:ext>
+            </a:extLst>
+          </p:cNvPr>
+          <p:cNvSpPr txBox="1"/>
+          <p:nvPr/>
+        </p:nvSpPr>
+        <p:spPr>
+          <a:xfrm>
+            <a:off x="642251" y="1224720"/>
+            <a:ext cx="9324709" cy="2450243"/>
+          </a:xfrm>
+          <a:prstGeom prst="rect">
+            <a:avLst/>
+          </a:prstGeom>
+          <a:noFill/>
+          <a:ln>
+            <a:noFill/>
+          </a:ln>
+        </p:spPr>
+        <p:txBody>
+          <a:bodyPr vert="horz" wrap="none" lIns="90000" tIns="45000" rIns="90000" bIns="45000" anchorCtr="0" compatLnSpc="0">
+            <a:spAutoFit/>
+          </a:bodyPr>
+          <a:lstStyle/>
+          <a:p>
+            <a:pPr marL="0" marR="0" lvl="0" indent="0" algn="r" rtl="1" hangingPunct="0">
+              <a:lnSpc>
+                <a:spcPct val="100000"/>
+              </a:lnSpc>
+              <a:spcBef>
+                <a:spcPts val="0"/>
+              </a:spcBef>
+              <a:spcAft>
+                <a:spcPts val="0"/>
+              </a:spcAft>
+              <a:buSzPct val="45000"/>
+              <a:buFont typeface="StarSymbol"/>
+              <a:buChar char="●"/>
+              <a:tabLst/>
+            </a:pPr>
+            <a:r>
+              <a:rPr lang="he-IL" sz="4000" b="0" i="0" u="none" strike="noStrike" kern="1200" cap="none">
+                <a:ln>
+                  <a:noFill/>
+                </a:ln>
+                <a:solidFill>
+                  <a:srgbClr val="0000CC"/>
+                </a:solidFill>
+                <a:latin typeface="Liberation Sans" pitchFamily="34"/>
+                <a:ea typeface="Noto Sans CJK SC Regular" pitchFamily="2"/>
+                <a:cs typeface="Liberation Sans" pitchFamily="34"/>
+              </a:rPr>
+              <a:t>יש שתי גישות לפתרון בעיה </a:t>
+            </a:r>
+            <a:r>
+              <a:rPr lang="en-US" sz="4000" b="0" i="0" u="none" strike="noStrike" kern="1200" cap="none">
+                <a:ln>
+                  <a:noFill/>
+                </a:ln>
+                <a:solidFill>
+                  <a:srgbClr val="0000CC"/>
+                </a:solidFill>
+                <a:latin typeface="Liberation Sans" pitchFamily="34"/>
+                <a:ea typeface="Noto Sans CJK SC Regular" pitchFamily="2"/>
+                <a:cs typeface="Liberation Sans" pitchFamily="34"/>
+              </a:rPr>
+              <a:t>NP</a:t>
+            </a:r>
+            <a:r>
+              <a:rPr lang="he-IL" sz="4000" b="0" i="0" u="none" strike="noStrike" kern="1200" cap="none">
+                <a:ln>
+                  <a:noFill/>
+                </a:ln>
+                <a:solidFill>
+                  <a:srgbClr val="0000CC"/>
+                </a:solidFill>
+                <a:latin typeface="Liberation Sans" pitchFamily="34"/>
+                <a:ea typeface="Noto Sans CJK SC Regular" pitchFamily="2"/>
+                <a:cs typeface="Liberation Sans" pitchFamily="34"/>
+              </a:rPr>
+              <a:t>-</a:t>
+            </a:r>
+            <a:r>
+              <a:rPr lang="en-US" sz="4000" b="0" i="0" u="none" strike="noStrike" kern="1200" cap="none">
+                <a:ln>
+                  <a:noFill/>
+                </a:ln>
+                <a:solidFill>
+                  <a:srgbClr val="0000CC"/>
+                </a:solidFill>
+                <a:latin typeface="Liberation Sans" pitchFamily="34"/>
+                <a:ea typeface="Noto Sans CJK SC Regular" pitchFamily="2"/>
+                <a:cs typeface="Liberation Sans" pitchFamily="34"/>
+              </a:rPr>
+              <a:t>קשה:</a:t>
+            </a:r>
+          </a:p>
+          <a:p>
+            <a:pPr marL="0" marR="0" lvl="1" indent="0" algn="r" rtl="1" hangingPunct="0">
+              <a:lnSpc>
+                <a:spcPct val="100000"/>
+              </a:lnSpc>
+              <a:spcBef>
+                <a:spcPts val="0"/>
+              </a:spcBef>
+              <a:spcAft>
+                <a:spcPts val="0"/>
+              </a:spcAft>
+              <a:buSzPct val="45000"/>
+              <a:buFont typeface="StarSymbol"/>
+              <a:buChar char="●"/>
+              <a:tabLst/>
+            </a:pPr>
+            <a:r>
+              <a:rPr lang="he-IL" sz="4000" b="0" i="0" u="none" strike="noStrike" kern="1200" cap="none">
+                <a:ln>
+                  <a:noFill/>
+                </a:ln>
+                <a:solidFill>
+                  <a:srgbClr val="009933"/>
+                </a:solidFill>
+                <a:latin typeface="Liberation Sans" pitchFamily="34"/>
+                <a:ea typeface="Noto Sans CJK SC Regular" pitchFamily="2"/>
+                <a:cs typeface="Liberation Sans" pitchFamily="34"/>
+              </a:rPr>
+              <a:t>א. פתרון אופטימלי-בקירוב בזמן פולינומי;</a:t>
+            </a:r>
+          </a:p>
+          <a:p>
+            <a:pPr marL="0" marR="0" lvl="1" indent="0" algn="r" rtl="1" hangingPunct="0">
+              <a:lnSpc>
+                <a:spcPct val="100000"/>
+              </a:lnSpc>
+              <a:spcBef>
+                <a:spcPts val="0"/>
+              </a:spcBef>
+              <a:spcAft>
+                <a:spcPts val="0"/>
+              </a:spcAft>
+              <a:buSzPct val="45000"/>
+              <a:buFont typeface="StarSymbol"/>
+              <a:buChar char="●"/>
+              <a:tabLst/>
+            </a:pPr>
+            <a:r>
+              <a:rPr lang="he-IL" sz="4000" b="0" i="0" u="none" strike="noStrike" kern="1200" cap="none">
+                <a:ln>
+                  <a:noFill/>
+                </a:ln>
+                <a:solidFill>
+                  <a:srgbClr val="009933"/>
+                </a:solidFill>
+                <a:latin typeface="Liberation Sans" pitchFamily="34"/>
+                <a:ea typeface="Noto Sans CJK SC Regular" pitchFamily="2"/>
+                <a:cs typeface="Liberation Sans" pitchFamily="34"/>
+              </a:rPr>
+              <a:t>ב. פתרון אופטימלי-ממש בזמן מעריכי.</a:t>
+            </a:r>
+          </a:p>
+          <a:p>
+            <a:pPr marL="0" marR="0" lvl="0" indent="0" algn="r" rtl="1" hangingPunct="0">
+              <a:lnSpc>
+                <a:spcPct val="100000"/>
+              </a:lnSpc>
+              <a:spcBef>
+                <a:spcPts val="0"/>
+              </a:spcBef>
+              <a:spcAft>
+                <a:spcPts val="0"/>
+              </a:spcAft>
+              <a:buNone/>
+              <a:tabLst/>
+            </a:pPr>
+            <a:r>
+              <a:rPr lang="he-IL" sz="4000" b="0" i="0" u="none" strike="noStrike" kern="1200" cap="none">
+                <a:ln>
+                  <a:noFill/>
+                </a:ln>
+                <a:solidFill>
+                  <a:srgbClr val="6600FF"/>
+                </a:solidFill>
+                <a:latin typeface="Liberation Sans" pitchFamily="34"/>
+                <a:ea typeface="Noto Sans CJK SC Regular" pitchFamily="2"/>
+                <a:cs typeface="Liberation Sans" pitchFamily="34"/>
+              </a:rPr>
+              <a:t>מה לדעתכם הפתרון המתאים לבעיה שלנו?</a:t>
+            </a:r>
+          </a:p>
+        </p:txBody>
+      </p:sp>
+    </p:spTree>
+  </p:cSld>
+  <p:clrMapOvr>
+    <a:masterClrMapping/>
+  </p:clrMapOvr>
+</p:sld>
+</file>
+
 <file path=ppt/slides/slide2.xml><?xml version="1.0" encoding="utf-8"?>
 <p:sld xmlns:a="http://schemas.openxmlformats.org/drawingml/2006/main" xmlns:r="http://schemas.openxmlformats.org/officeDocument/2006/relationships" xmlns:p="http://schemas.openxmlformats.org/presentationml/2006/main">
   <p:cSld name="page2">
@@ -27585,7 +27821,7 @@
       </p:sp>
       <p:pic>
         <p:nvPicPr>
-          <p:cNvPr id="3" name="">
+          <p:cNvPr id="3" name="Picture 2">
             <a:extLst>
               <a:ext uri="{FF2B5EF4-FFF2-40B4-BE49-F238E27FC236}">
                 <a16:creationId xmlns:a16="http://schemas.microsoft.com/office/drawing/2014/main" id="{83DF77BC-39E1-2D2D-0880-5F9EE6A6A971}"/>
@@ -27631,271 +27867,6 @@
 
 <file path=ppt/slides/slide20.xml><?xml version="1.0" encoding="utf-8"?>
 <p:sld xmlns:a="http://schemas.openxmlformats.org/drawingml/2006/main" xmlns:r="http://schemas.openxmlformats.org/officeDocument/2006/relationships" xmlns:p="http://schemas.openxmlformats.org/presentationml/2006/main">
-  <p:cSld name="page27">
-    <p:spTree>
-      <p:nvGrpSpPr>
-        <p:cNvPr id="1" name=""/>
-        <p:cNvGrpSpPr/>
-        <p:nvPr/>
-      </p:nvGrpSpPr>
-      <p:grpSpPr>
-        <a:xfrm>
-          <a:off x="0" y="0"/>
-          <a:ext cx="0" cy="0"/>
-          <a:chOff x="0" y="0"/>
-          <a:chExt cx="0" cy="0"/>
-        </a:xfrm>
-      </p:grpSpPr>
-      <p:sp>
-        <p:nvSpPr>
-          <p:cNvPr id="2" name="Title 1">
-            <a:extLst>
-              <a:ext uri="{FF2B5EF4-FFF2-40B4-BE49-F238E27FC236}">
-                <a16:creationId xmlns:a16="http://schemas.microsoft.com/office/drawing/2014/main" id="{D919ADE2-6E38-0D70-AD43-A601348FBF33}"/>
-              </a:ext>
-            </a:extLst>
-          </p:cNvPr>
-          <p:cNvSpPr txBox="1">
-            <a:spLocks noGrp="1"/>
-          </p:cNvSpPr>
-          <p:nvPr>
-            <p:ph type="title" idx="4294967295"/>
-          </p:nvPr>
-        </p:nvSpPr>
-        <p:spPr>
-          <a:xfrm>
-            <a:off x="182880" y="130320"/>
-            <a:ext cx="9897119" cy="1250280"/>
-          </a:xfrm>
-        </p:spPr>
-        <p:txBody>
-          <a:bodyPr vert="horz"/>
-          <a:lstStyle/>
-          <a:p>
-            <a:pPr lvl="0" rtl="1"/>
-            <a:r>
-              <a:rPr lang="he-IL" b="1">
-                <a:latin typeface="Liberation Sans" pitchFamily="34"/>
-                <a:cs typeface="Liberation Sans" pitchFamily="34"/>
-              </a:rPr>
-              <a:t>מעגלי-החלפה באורך </a:t>
-            </a:r>
-            <a:r>
-              <a:rPr lang="en-US" b="1">
-                <a:latin typeface="Liberation Sans" pitchFamily="34"/>
-                <a:cs typeface="Liberation Sans" pitchFamily="34"/>
-              </a:rPr>
-              <a:t>L</a:t>
-            </a:r>
-          </a:p>
-        </p:txBody>
-      </p:sp>
-      <p:sp>
-        <p:nvSpPr>
-          <p:cNvPr id="3" name="TextBox 2">
-            <a:extLst>
-              <a:ext uri="{FF2B5EF4-FFF2-40B4-BE49-F238E27FC236}">
-                <a16:creationId xmlns:a16="http://schemas.microsoft.com/office/drawing/2014/main" id="{C7DDC49F-CC1E-CE3E-311D-4948CA1613EE}"/>
-              </a:ext>
-            </a:extLst>
-          </p:cNvPr>
-          <p:cNvSpPr txBox="1"/>
-          <p:nvPr/>
-        </p:nvSpPr>
-        <p:spPr>
-          <a:xfrm>
-            <a:off x="642251" y="1224720"/>
-            <a:ext cx="9324709" cy="2450243"/>
-          </a:xfrm>
-          <a:prstGeom prst="rect">
-            <a:avLst/>
-          </a:prstGeom>
-          <a:noFill/>
-          <a:ln>
-            <a:noFill/>
-          </a:ln>
-        </p:spPr>
-        <p:txBody>
-          <a:bodyPr vert="horz" wrap="none" lIns="90000" tIns="45000" rIns="90000" bIns="45000" anchorCtr="0" compatLnSpc="0">
-            <a:spAutoFit/>
-          </a:bodyPr>
-          <a:lstStyle/>
-          <a:p>
-            <a:pPr marL="0" marR="0" lvl="0" indent="0" algn="r" rtl="1" hangingPunct="0">
-              <a:lnSpc>
-                <a:spcPct val="100000"/>
-              </a:lnSpc>
-              <a:spcBef>
-                <a:spcPts val="0"/>
-              </a:spcBef>
-              <a:spcAft>
-                <a:spcPts val="0"/>
-              </a:spcAft>
-              <a:buSzPct val="45000"/>
-              <a:buFont typeface="StarSymbol"/>
-              <a:buChar char="●"/>
-              <a:tabLst/>
-            </a:pPr>
-            <a:r>
-              <a:rPr lang="he-IL" sz="4000" b="0" i="0" u="none" strike="noStrike" kern="1200" cap="none">
-                <a:ln>
-                  <a:noFill/>
-                </a:ln>
-                <a:solidFill>
-                  <a:srgbClr val="0000CC"/>
-                </a:solidFill>
-                <a:latin typeface="Liberation Sans" pitchFamily="34"/>
-                <a:ea typeface="Noto Sans CJK SC Regular" pitchFamily="2"/>
-                <a:cs typeface="Liberation Sans" pitchFamily="34"/>
-              </a:rPr>
-              <a:t>יש שתי גישות לפתרון בעיה </a:t>
-            </a:r>
-            <a:r>
-              <a:rPr lang="en-US" sz="4000" b="0" i="0" u="none" strike="noStrike" kern="1200" cap="none">
-                <a:ln>
-                  <a:noFill/>
-                </a:ln>
-                <a:solidFill>
-                  <a:srgbClr val="0000CC"/>
-                </a:solidFill>
-                <a:latin typeface="Liberation Sans" pitchFamily="34"/>
-                <a:ea typeface="Noto Sans CJK SC Regular" pitchFamily="2"/>
-                <a:cs typeface="Liberation Sans" pitchFamily="34"/>
-              </a:rPr>
-              <a:t>NP</a:t>
-            </a:r>
-            <a:r>
-              <a:rPr lang="he-IL" sz="4000" b="0" i="0" u="none" strike="noStrike" kern="1200" cap="none">
-                <a:ln>
-                  <a:noFill/>
-                </a:ln>
-                <a:solidFill>
-                  <a:srgbClr val="0000CC"/>
-                </a:solidFill>
-                <a:latin typeface="Liberation Sans" pitchFamily="34"/>
-                <a:ea typeface="Noto Sans CJK SC Regular" pitchFamily="2"/>
-                <a:cs typeface="Liberation Sans" pitchFamily="34"/>
-              </a:rPr>
-              <a:t>-</a:t>
-            </a:r>
-            <a:r>
-              <a:rPr lang="en-US" sz="4000" b="0" i="0" u="none" strike="noStrike" kern="1200" cap="none">
-                <a:ln>
-                  <a:noFill/>
-                </a:ln>
-                <a:solidFill>
-                  <a:srgbClr val="0000CC"/>
-                </a:solidFill>
-                <a:latin typeface="Liberation Sans" pitchFamily="34"/>
-                <a:ea typeface="Noto Sans CJK SC Regular" pitchFamily="2"/>
-                <a:cs typeface="Liberation Sans" pitchFamily="34"/>
-              </a:rPr>
-              <a:t>קשה:</a:t>
-            </a:r>
-          </a:p>
-          <a:p>
-            <a:pPr marL="0" marR="0" lvl="1" indent="0" algn="r" rtl="1" hangingPunct="0">
-              <a:lnSpc>
-                <a:spcPct val="100000"/>
-              </a:lnSpc>
-              <a:spcBef>
-                <a:spcPts val="0"/>
-              </a:spcBef>
-              <a:spcAft>
-                <a:spcPts val="0"/>
-              </a:spcAft>
-              <a:buSzPct val="45000"/>
-              <a:buFont typeface="StarSymbol"/>
-              <a:buChar char="●"/>
-              <a:tabLst/>
-            </a:pPr>
-            <a:r>
-              <a:rPr lang="he-IL" sz="4000" b="0" i="0" u="none" strike="noStrike" kern="1200" cap="none">
-                <a:ln>
-                  <a:noFill/>
-                </a:ln>
-                <a:solidFill>
-                  <a:srgbClr val="009933"/>
-                </a:solidFill>
-                <a:latin typeface="Liberation Sans" pitchFamily="34"/>
-                <a:ea typeface="Noto Sans CJK SC Regular" pitchFamily="2"/>
-                <a:cs typeface="Liberation Sans" pitchFamily="34"/>
-              </a:rPr>
-              <a:t>א. פתרון אופטימלי-בקירוב בזמן פולינומי;</a:t>
-            </a:r>
-          </a:p>
-          <a:p>
-            <a:pPr marL="0" marR="0" lvl="1" indent="0" algn="r" rtl="1" hangingPunct="0">
-              <a:lnSpc>
-                <a:spcPct val="100000"/>
-              </a:lnSpc>
-              <a:spcBef>
-                <a:spcPts val="0"/>
-              </a:spcBef>
-              <a:spcAft>
-                <a:spcPts val="0"/>
-              </a:spcAft>
-              <a:buSzPct val="45000"/>
-              <a:buFont typeface="StarSymbol"/>
-              <a:buChar char="●"/>
-              <a:tabLst/>
-            </a:pPr>
-            <a:r>
-              <a:rPr lang="he-IL" sz="4000" b="0" i="0" u="none" strike="noStrike" kern="1200" cap="none">
-                <a:ln>
-                  <a:noFill/>
-                </a:ln>
-                <a:solidFill>
-                  <a:srgbClr val="009933"/>
-                </a:solidFill>
-                <a:latin typeface="Liberation Sans" pitchFamily="34"/>
-                <a:ea typeface="Noto Sans CJK SC Regular" pitchFamily="2"/>
-                <a:cs typeface="Liberation Sans" pitchFamily="34"/>
-              </a:rPr>
-              <a:t>ב. פתרון אופטימלי-ממש בזמן מעריכי.</a:t>
-            </a:r>
-          </a:p>
-          <a:p>
-            <a:pPr marL="0" marR="0" lvl="0" indent="0" algn="r" rtl="1" hangingPunct="0">
-              <a:lnSpc>
-                <a:spcPct val="100000"/>
-              </a:lnSpc>
-              <a:spcBef>
-                <a:spcPts val="0"/>
-              </a:spcBef>
-              <a:spcAft>
-                <a:spcPts val="0"/>
-              </a:spcAft>
-              <a:buNone/>
-              <a:tabLst/>
-            </a:pPr>
-            <a:r>
-              <a:rPr lang="he-IL" sz="4000" b="0" i="0" u="none" strike="noStrike" kern="1200" cap="none">
-                <a:ln>
-                  <a:noFill/>
-                </a:ln>
-                <a:solidFill>
-                  <a:srgbClr val="6600FF"/>
-                </a:solidFill>
-                <a:latin typeface="Liberation Sans" pitchFamily="34"/>
-                <a:ea typeface="Noto Sans CJK SC Regular" pitchFamily="2"/>
-                <a:cs typeface="Liberation Sans" pitchFamily="34"/>
-              </a:rPr>
-              <a:t>מה לדעתכם הפתרון המתאים לבעיה שלנו?</a:t>
-            </a:r>
-          </a:p>
-        </p:txBody>
-      </p:sp>
-    </p:spTree>
-  </p:cSld>
-  <p:clrMapOvr>
-    <a:masterClrMapping/>
-  </p:clrMapOvr>
-</p:sld>
-</file>
-
-<file path=ppt/slides/slide21.xml><?xml version="1.0" encoding="utf-8"?>
-<p:sld xmlns:a="http://schemas.openxmlformats.org/drawingml/2006/main" xmlns:r="http://schemas.openxmlformats.org/officeDocument/2006/relationships" xmlns:p="http://schemas.openxmlformats.org/presentationml/2006/main">
   <p:cSld name="page28">
     <p:spTree>
       <p:nvGrpSpPr>
@@ -28301,7 +28272,7 @@
       </p:sp>
       <p:pic>
         <p:nvPicPr>
-          <p:cNvPr id="5" name="">
+          <p:cNvPr id="5" name="Picture 4">
             <a:extLst>
               <a:ext uri="{FF2B5EF4-FFF2-40B4-BE49-F238E27FC236}">
                 <a16:creationId xmlns:a16="http://schemas.microsoft.com/office/drawing/2014/main" id="{B215BDEA-DF7B-A205-6B3C-8DDD8146981C}"/>
@@ -28345,7 +28316,7 @@
 </p:sld>
 </file>
 
-<file path=ppt/slides/slide22.xml><?xml version="1.0" encoding="utf-8"?>
+<file path=ppt/slides/slide21.xml><?xml version="1.0" encoding="utf-8"?>
 <p:sld xmlns:a="http://schemas.openxmlformats.org/drawingml/2006/main" xmlns:r="http://schemas.openxmlformats.org/officeDocument/2006/relationships" xmlns:p="http://schemas.openxmlformats.org/presentationml/2006/main">
   <p:cSld name="page29">
     <p:spTree>
@@ -28981,7 +28952,7 @@
 </p:sld>
 </file>
 
-<file path=ppt/slides/slide23.xml><?xml version="1.0" encoding="utf-8"?>
+<file path=ppt/slides/slide22.xml><?xml version="1.0" encoding="utf-8"?>
 <p:sld xmlns:a="http://schemas.openxmlformats.org/drawingml/2006/main" xmlns:r="http://schemas.openxmlformats.org/officeDocument/2006/relationships" xmlns:p="http://schemas.openxmlformats.org/presentationml/2006/main">
   <p:cSld name="Donor Chains">
     <p:spTree>
@@ -29218,7 +29189,7 @@
           <a:p>
             <a:pPr lvl="0" algn="r" hangingPunct="0"/>
             <a:fld id="{C82DBCC5-5C42-41E3-A3CA-14425AE8E554}" type="slidenum">
-              <a:t>23</a:t>
+              <a:t>22</a:t>
             </a:fld>
             <a:endParaRPr lang="en-US" sz="1000">
               <a:solidFill>
@@ -29746,7 +29717,7 @@
 </p:sld>
 </file>
 
-<file path=ppt/slides/slide24.xml><?xml version="1.0" encoding="utf-8"?>
+<file path=ppt/slides/slide23.xml><?xml version="1.0" encoding="utf-8"?>
 <p:sld xmlns:a="http://schemas.openxmlformats.org/drawingml/2006/main" xmlns:r="http://schemas.openxmlformats.org/officeDocument/2006/relationships" xmlns:p="http://schemas.openxmlformats.org/presentationml/2006/main">
   <p:cSld name="A Long Donor Chain">
     <p:spTree>
@@ -29888,7 +29859,7 @@
           <a:p>
             <a:pPr lvl="0" algn="r" hangingPunct="0"/>
             <a:fld id="{F218C774-9CAB-4A4B-8194-BA0CAC3CD0C5}" type="slidenum">
-              <a:t>24</a:t>
+              <a:t>23</a:t>
             </a:fld>
             <a:endParaRPr lang="en-US" sz="1000">
               <a:solidFill>
@@ -31354,7 +31325,7 @@
       </p:graphicFrame>
       <p:pic>
         <p:nvPicPr>
-          <p:cNvPr id="4" name="">
+          <p:cNvPr id="4" name="Picture 3">
             <a:extLst>
               <a:ext uri="{FF2B5EF4-FFF2-40B4-BE49-F238E27FC236}">
                 <a16:creationId xmlns:a16="http://schemas.microsoft.com/office/drawing/2014/main" id="{2C7906B4-D680-070F-FB48-A486C0930144}"/>
@@ -31392,7 +31363,7 @@
       </p:pic>
       <p:pic>
         <p:nvPicPr>
-          <p:cNvPr id="5" name="">
+          <p:cNvPr id="5" name="Picture 4">
             <a:extLst>
               <a:ext uri="{FF2B5EF4-FFF2-40B4-BE49-F238E27FC236}">
                 <a16:creationId xmlns:a16="http://schemas.microsoft.com/office/drawing/2014/main" id="{93BEB1AD-85C5-A372-6A47-E567AE5314DB}"/>
@@ -31430,7 +31401,7 @@
       </p:pic>
       <p:pic>
         <p:nvPicPr>
-          <p:cNvPr id="6" name="">
+          <p:cNvPr id="6" name="Picture 5">
             <a:extLst>
               <a:ext uri="{FF2B5EF4-FFF2-40B4-BE49-F238E27FC236}">
                 <a16:creationId xmlns:a16="http://schemas.microsoft.com/office/drawing/2014/main" id="{1F7E1672-8AEF-99B4-9896-488DCB26D603}"/>
@@ -31468,7 +31439,7 @@
       </p:pic>
       <p:pic>
         <p:nvPicPr>
-          <p:cNvPr id="7" name="">
+          <p:cNvPr id="7" name="Picture 6">
             <a:extLst>
               <a:ext uri="{FF2B5EF4-FFF2-40B4-BE49-F238E27FC236}">
                 <a16:creationId xmlns:a16="http://schemas.microsoft.com/office/drawing/2014/main" id="{02E2F612-8B6E-488A-2A81-035EEC6FC100}"/>
@@ -32608,7 +32579,7 @@
       </p:grpSpPr>
       <p:pic>
         <p:nvPicPr>
-          <p:cNvPr id="4" name="">
+          <p:cNvPr id="4" name="Picture 3">
             <a:extLst>
               <a:ext uri="{FF2B5EF4-FFF2-40B4-BE49-F238E27FC236}">
                 <a16:creationId xmlns:a16="http://schemas.microsoft.com/office/drawing/2014/main" id="{548D6859-D50E-6E63-7309-201A47C2C7AA}"/>
